--- a/样板间投顾组合净值预估/守正组合回测/output/守正组合业绩模拟两页.pptx
+++ b/样板间投顾组合净值预估/守正组合回测/output/守正组合业绩模拟两页.pptx
@@ -3284,7 +3284,7 @@
                           </a:solidFill>
                           <a:latin typeface="微软雅黑"/>
                         </a:rPr>
-                        <a:t>同花顺全A等权</a:t>
+                        <a:t>同花顺全A(加权)</a:t>
                       </a:r>
                     </a:p>
                   </a:txBody>
@@ -3491,7 +3491,7 @@
                           </a:solidFill>
                           <a:latin typeface="微软雅黑"/>
                         </a:rPr>
-                        <a:t>8.78%</a:t>
+                        <a:t>8.77%</a:t>
                       </a:r>
                     </a:p>
                   </a:txBody>
@@ -3539,7 +3539,7 @@
                           </a:solidFill>
                           <a:latin typeface="微软雅黑"/>
                         </a:rPr>
-                        <a:t>19.32%</a:t>
+                        <a:t>20.05%</a:t>
                       </a:r>
                     </a:p>
                   </a:txBody>
@@ -3587,7 +3587,7 @@
                           </a:solidFill>
                           <a:latin typeface="微软雅黑"/>
                         </a:rPr>
-                        <a:t>-31.42%</a:t>
+                        <a:t>-37.16%</a:t>
                       </a:r>
                     </a:p>
                   </a:txBody>
@@ -3635,7 +3635,7 @@
                           </a:solidFill>
                           <a:latin typeface="微软雅黑"/>
                         </a:rPr>
-                        <a:t>0.45</a:t>
+                        <a:t>0.44</a:t>
                       </a:r>
                     </a:p>
                   </a:txBody>
@@ -3765,7 +3765,7 @@
                 </a:solidFill>
                 <a:latin typeface="微软雅黑"/>
               </a:rPr>
-              <a:t>76.49%</a:t>
+              <a:t>76.29%</a:t>
             </a:r>
           </a:p>
           <a:p>
@@ -3790,7 +3790,7 @@
                 </a:solidFill>
                 <a:latin typeface="微软雅黑"/>
               </a:rPr>
-              <a:t>100.41%</a:t>
+              <a:t>41.40%</a:t>
             </a:r>
           </a:p>
           <a:p>
@@ -3811,11 +3811,11 @@
             <a:r>
               <a:rPr sz="1400" b="1">
                 <a:solidFill>
-                  <a:srgbClr val="1E8449"/>
+                  <a:srgbClr val="C0392B"/>
                 </a:solidFill>
                 <a:latin typeface="微软雅黑"/>
               </a:rPr>
-              <a:t>-23.92%</a:t>
+              <a:t>34.90%</a:t>
             </a:r>
           </a:p>
         </p:txBody>
@@ -3849,7 +3849,7 @@
                 </a:solidFill>
                 <a:latin typeface="微软雅黑"/>
               </a:rPr>
-              <a:t>注：数据来源为腾讯 NeoData/同花顺 iFinD。策略历史表现不构成对未来业绩的承诺。统计区间为2020年1月2日-2026年9月30日（月频）。计算夏普比例时，无风险收益按0%计。基金成立满1个月后接续基金净值，此前用跟踪指数（价格指数）代替。</a:t>
+              <a:t>注：数据来源为腾讯 NeoData/同花顺 iFinD。策略历史表现不构成对未来业绩的承诺。统计区间为2020年1月2日-2026年9月30日（日频）。计算夏普比例时，无风险收益按0%计。基金成立满1个月后接续基金净值，此前用跟踪指数（价格指数）代替。</a:t>
             </a:r>
           </a:p>
         </p:txBody>
@@ -4040,7 +4040,7 @@
                 </a:solidFill>
                 <a:latin typeface="微软雅黑"/>
               </a:rPr>
-              <a:t>6个完整年度有4年为正收益。最高年度收益34.25%，最低年度收益-18.55%，年化收益率8.78%。81个完整月度录得46个月(56.8%)正收益。最高月度收益19.45%，最低月度收益-14.36%，平均月度收益0.86%</a:t>
+              <a:t>6个完整年度有4年为正收益。最高年度收益34.54%，最低年度收益-18.46%，年化收益率8.77%。81个完整月度录得46个月(56.8%)正收益。最高月度收益19.44%，最低月度收益-14.36%，平均月度收益0.85%</a:t>
             </a:r>
           </a:p>
         </p:txBody>
@@ -4881,7 +4881,7 @@
                           </a:solidFill>
                           <a:latin typeface="微软雅黑"/>
                         </a:rPr>
-                        <a:t>0.31%</a:t>
+                        <a:t>0.85%</a:t>
                       </a:r>
                     </a:p>
                   </a:txBody>
@@ -4904,7 +4904,7 @@
                           </a:solidFill>
                           <a:latin typeface="微软雅黑"/>
                         </a:rPr>
-                        <a:t>-1.66%</a:t>
+                        <a:t>-2.19%</a:t>
                       </a:r>
                     </a:p>
                   </a:txBody>
@@ -5481,7 +5481,7 @@
                           </a:solidFill>
                           <a:latin typeface="微软雅黑"/>
                         </a:rPr>
-                        <a:t>-3.14%</a:t>
+                        <a:t>-3.04%</a:t>
                       </a:r>
                     </a:p>
                   </a:txBody>
@@ -5504,7 +5504,7 @@
                           </a:solidFill>
                           <a:latin typeface="微软雅黑"/>
                         </a:rPr>
-                        <a:t>-18.55%</a:t>
+                        <a:t>-18.46%</a:t>
                       </a:r>
                     </a:p>
                   </a:txBody>
@@ -5550,7 +5550,7 @@
                           </a:solidFill>
                           <a:latin typeface="微软雅黑"/>
                         </a:rPr>
-                        <a:t>-16.83%</a:t>
+                        <a:t>-22.18%</a:t>
                       </a:r>
                     </a:p>
                   </a:txBody>
@@ -5598,7 +5598,7 @@
                           </a:solidFill>
                           <a:latin typeface="微软雅黑"/>
                         </a:rPr>
-                        <a:t>7.32%</a:t>
+                        <a:t>7.20%</a:t>
                       </a:r>
                     </a:p>
                   </a:txBody>
@@ -5713,7 +5713,7 @@
                           </a:solidFill>
                           <a:latin typeface="微软雅黑"/>
                         </a:rPr>
-                        <a:t>1.19%</a:t>
+                        <a:t>1.49%</a:t>
                       </a:r>
                     </a:p>
                   </a:txBody>
@@ -5782,7 +5782,7 @@
                           </a:solidFill>
                           <a:latin typeface="微软雅黑"/>
                         </a:rPr>
-                        <a:t>-0.54%</a:t>
+                        <a:t>-0.57%</a:t>
                       </a:r>
                     </a:p>
                   </a:txBody>
@@ -5805,7 +5805,7 @@
                           </a:solidFill>
                           <a:latin typeface="微软雅黑"/>
                         </a:rPr>
-                        <a:t>-2.40%</a:t>
+                        <a:t>-2.37%</a:t>
                       </a:r>
                     </a:p>
                   </a:txBody>
@@ -5828,7 +5828,7 @@
                           </a:solidFill>
                           <a:latin typeface="微软雅黑"/>
                         </a:rPr>
-                        <a:t>1.28%</a:t>
+                        <a:t>1.29%</a:t>
                       </a:r>
                     </a:p>
                   </a:txBody>
@@ -5851,7 +5851,7 @@
                           </a:solidFill>
                           <a:latin typeface="微软雅黑"/>
                         </a:rPr>
-                        <a:t>-1.66%</a:t>
+                        <a:t>-1.80%</a:t>
                       </a:r>
                     </a:p>
                   </a:txBody>
@@ -5874,7 +5874,7 @@
                           </a:solidFill>
                           <a:latin typeface="微软雅黑"/>
                         </a:rPr>
-                        <a:t>-3.45%</a:t>
+                        <a:t>-3.41%</a:t>
                       </a:r>
                     </a:p>
                   </a:txBody>
@@ -5920,7 +5920,7 @@
                           </a:solidFill>
                           <a:latin typeface="微软雅黑"/>
                         </a:rPr>
-                        <a:t>-10.49%</a:t>
+                        <a:t>-10.35%</a:t>
                       </a:r>
                     </a:p>
                   </a:txBody>
@@ -5968,7 +5968,7 @@
                           </a:solidFill>
                           <a:latin typeface="微软雅黑"/>
                         </a:rPr>
-                        <a:t>-12.79%</a:t>
+                        <a:t>-12.64%</a:t>
                       </a:r>
                     </a:p>
                   </a:txBody>
@@ -5991,7 +5991,7 @@
                           </a:solidFill>
                           <a:latin typeface="微软雅黑"/>
                         </a:rPr>
-                        <a:t>8.57%</a:t>
+                        <a:t>7.91%</a:t>
                       </a:r>
                     </a:p>
                   </a:txBody>
@@ -6014,7 +6014,7 @@
                           </a:solidFill>
                           <a:latin typeface="微软雅黑"/>
                         </a:rPr>
-                        <a:t>1.17%</a:t>
+                        <a:t>1.49%</a:t>
                       </a:r>
                     </a:p>
                   </a:txBody>
@@ -6037,7 +6037,7 @@
                           </a:solidFill>
                           <a:latin typeface="微软雅黑"/>
                         </a:rPr>
-                        <a:t>2.08%</a:t>
+                        <a:t>1.78%</a:t>
                       </a:r>
                     </a:p>
                   </a:txBody>
@@ -6060,7 +6060,7 @@
                           </a:solidFill>
                           <a:latin typeface="微软雅黑"/>
                         </a:rPr>
-                        <a:t>-0.84%</a:t>
+                        <a:t>-0.82%</a:t>
                       </a:r>
                     </a:p>
                   </a:txBody>
@@ -6083,7 +6083,7 @@
                           </a:solidFill>
                           <a:latin typeface="微软雅黑"/>
                         </a:rPr>
-                        <a:t>-4.15%</a:t>
+                        <a:t>-4.26%</a:t>
                       </a:r>
                     </a:p>
                   </a:txBody>
@@ -6106,7 +6106,7 @@
                           </a:solidFill>
                           <a:latin typeface="微软雅黑"/>
                         </a:rPr>
-                        <a:t>-1.03%</a:t>
+                        <a:t>-0.91%</a:t>
                       </a:r>
                     </a:p>
                   </a:txBody>
@@ -6152,7 +6152,7 @@
                           </a:solidFill>
                           <a:latin typeface="微软雅黑"/>
                         </a:rPr>
-                        <a:t>19.45%</a:t>
+                        <a:t>19.44%</a:t>
                       </a:r>
                     </a:p>
                   </a:txBody>
@@ -6175,7 +6175,7 @@
                           </a:solidFill>
                           <a:latin typeface="微软雅黑"/>
                         </a:rPr>
-                        <a:t>0.88%</a:t>
+                        <a:t>0.84%</a:t>
                       </a:r>
                     </a:p>
                   </a:txBody>
@@ -6198,7 +6198,7 @@
                           </a:solidFill>
                           <a:latin typeface="微软雅黑"/>
                         </a:rPr>
-                        <a:t>2.08%</a:t>
+                        <a:t>2.03%</a:t>
                       </a:r>
                     </a:p>
                   </a:txBody>
@@ -6221,7 +6221,7 @@
                           </a:solidFill>
                           <a:latin typeface="微软雅黑"/>
                         </a:rPr>
-                        <a:t>-0.09%</a:t>
+                        <a:t>-0.08%</a:t>
                       </a:r>
                     </a:p>
                   </a:txBody>
@@ -6244,7 +6244,7 @@
                           </a:solidFill>
                           <a:latin typeface="微软雅黑"/>
                         </a:rPr>
-                        <a:t>9.46%</a:t>
+                        <a:t>8.93%</a:t>
                       </a:r>
                     </a:p>
                   </a:txBody>
@@ -6290,7 +6290,7 @@
                           </a:solidFill>
                           <a:latin typeface="微软雅黑"/>
                         </a:rPr>
-                        <a:t>-8.91%</a:t>
+                        <a:t>-12.64%</a:t>
                       </a:r>
                     </a:p>
                   </a:txBody>
@@ -6361,7 +6361,7 @@
                           </a:solidFill>
                           <a:latin typeface="微软雅黑"/>
                         </a:rPr>
-                        <a:t>3.68%</a:t>
+                        <a:t>3.92%</a:t>
                       </a:r>
                     </a:p>
                   </a:txBody>
@@ -6430,7 +6430,7 @@
                           </a:solidFill>
                           <a:latin typeface="微软雅黑"/>
                         </a:rPr>
-                        <a:t>2.63%</a:t>
+                        <a:t>2.62%</a:t>
                       </a:r>
                     </a:p>
                   </a:txBody>
@@ -6453,7 +6453,7 @@
                           </a:solidFill>
                           <a:latin typeface="微软雅黑"/>
                         </a:rPr>
-                        <a:t>5.37%</a:t>
+                        <a:t>5.36%</a:t>
                       </a:r>
                     </a:p>
                   </a:txBody>
@@ -6499,7 +6499,7 @@
                           </a:solidFill>
                           <a:latin typeface="微软雅黑"/>
                         </a:rPr>
-                        <a:t>10.27%</a:t>
+                        <a:t>10.26%</a:t>
                       </a:r>
                     </a:p>
                   </a:txBody>
@@ -6545,7 +6545,7 @@
                           </a:solidFill>
                           <a:latin typeface="微软雅黑"/>
                         </a:rPr>
-                        <a:t>0.32%</a:t>
+                        <a:t>0.31%</a:t>
                       </a:r>
                     </a:p>
                   </a:txBody>
@@ -6614,7 +6614,7 @@
                           </a:solidFill>
                           <a:latin typeface="微软雅黑"/>
                         </a:rPr>
-                        <a:t>34.25%</a:t>
+                        <a:t>34.54%</a:t>
                       </a:r>
                     </a:p>
                   </a:txBody>
@@ -7219,7 +7219,7 @@
                           </a:solidFill>
                           <a:latin typeface="微软雅黑"/>
                         </a:rPr>
-                        <a:t>76.49%</a:t>
+                        <a:t>76.29%</a:t>
                       </a:r>
                     </a:p>
                   </a:txBody>
@@ -7265,7 +7265,7 @@
                           </a:solidFill>
                           <a:latin typeface="微软雅黑"/>
                         </a:rPr>
-                        <a:t>-31.42%</a:t>
+                        <a:t>-37.16%</a:t>
                       </a:r>
                     </a:p>
                   </a:txBody>
@@ -7309,7 +7309,7 @@
                 </a:solidFill>
                 <a:latin typeface="微软雅黑"/>
               </a:rPr>
-              <a:t>数据来源：腾讯 NeoData/同花顺 iFinD。回测区间为2020/1/2-2026/9/30（月频）。历史回测不代表未来表现，以上涉及的相关数据均为假设条件或虚拟回测，仅为实现策略举例说明之目的、用于投资者教育，不涉及任何具体产品信息及其宣传推介，历史业绩不预示未来表现。</a:t>
+              <a:t>数据来源：腾讯 NeoData/同花顺 iFinD。回测区间为2020/1/2-2026/9/30（日频）。历史回测不代表未来表现，以上涉及的相关数据均为假设条件或虚拟回测，仅为实现策略举例说明之目的、用于投资者教育，不涉及任何具体产品信息及其宣传推介，历史业绩不预示未来表现。</a:t>
             </a:r>
           </a:p>
         </p:txBody>
